--- a/public/fun/pack/pptx/newspro/카드뉴스프리미엄_16_알뜰생활팁_마린화이트.pptx
+++ b/public/fun/pack/pptx/newspro/카드뉴스프리미엄_16_알뜰생활팁_마린화이트.pptx
@@ -113,12 +113,12 @@
   <p:extLst>
     <p:ext uri="{521415D9-36F7-43E2-AB2F-B90AF26B5E84}">
       <p14:sectionLst xmlns:p14="http://schemas.microsoft.com/office/powerpoint/2010/main">
-        <p14:section name="시작" id="{92FBF787-6D27-477E-B0F1-0DC5846A75F6}">
+        <p14:section name="시작" id="{E3EE8055-F6C2-4081-AC07-A277DF9A3256}">
           <p14:sldIdLst>
             <p14:sldId id="256"/>
           </p14:sldIdLst>
         </p14:section>
-        <p14:section name="본문" id="{695CD9C2-B99C-4845-9A7E-B799EBA64658}">
+        <p14:section name="본문" id="{84C4AF74-3D80-4105-8734-950EF413D361}">
           <p14:sldIdLst>
             <p14:sldId id="257"/>
             <p14:sldId id="258"/>
@@ -127,7 +127,7 @@
             <p14:sldId id="261"/>
           </p14:sldIdLst>
         </p14:section>
-        <p14:section name="마무리" id="{B330AF3C-9929-4426-AD82-A3F712FA705A}">
+        <p14:section name="마무리" id="{26C6F59A-FC6E-4E65-99E7-C959816AEBF7}">
           <p14:sldIdLst>
             <p14:sldId id="262"/>
           </p14:sldIdLst>
@@ -1524,7 +1524,7 @@
             </a:lvl1pPr>
           </a:lstStyle>
           <a:p>
-            <a:fld id="{1DE229F6-04F4-46C2-B098-1871C713D50E}" type="slidenum">
+            <a:fld id="{7D02A527-F6C4-4CC9-B6A9-ABC56F7F2F05}" type="slidenum">
               <a:rPr lang="en-US"/>
               <a:t>‹#›</a:t>
             </a:fld>
@@ -2195,7 +2195,7 @@
             </a:lvl1pPr>
           </a:lstStyle>
           <a:p>
-            <a:fld id="{BD0EEF97-F091-46EA-A341-BA89F59F5910}" type="slidenum">
+            <a:fld id="{CB264BC2-21B2-4432-8945-48CBA4DD6AA0}" type="slidenum">
               <a:rPr lang="en-US"/>
               <a:t>‹#›</a:t>
             </a:fld>
@@ -2873,7 +2873,7 @@
             </a:lvl1pPr>
           </a:lstStyle>
           <a:p>
-            <a:fld id="{C43A2793-0AF8-4E5C-B1D7-A88A65FB3620}" type="slidenum">
+            <a:fld id="{CADC65F2-1B2B-4485-848D-F2F9C4609618}" type="slidenum">
               <a:rPr lang="en-US"/>
               <a:t>‹#›</a:t>
             </a:fld>
@@ -3692,7 +3692,7 @@
           <a:p>
             <a:r>
               <a:rPr lang="ko-KR"/>
-              <a:t>한 달 용돈, 어디로 갔을까요</a:t>
+              <a:t>용돈, 어디로 갔을까요</a:t>
             </a:r>
           </a:p>
         </p:txBody>
@@ -3821,7 +3821,7 @@
           <a:bodyPr/>
           <a:lstStyle/>
           <a:p>
-            <a:fld id="{BE5CF337-A998-4930-8149-991521333643}" type="slidenum">
+            <a:fld id="{D58BC693-4A00-4728-8F55-E0E4292A9587}" type="slidenum">
               <a:rPr lang="en-US"/>
               <a:t>‹#›</a:t>
             </a:fld>
@@ -3987,7 +3987,7 @@
           <a:bodyPr/>
           <a:lstStyle/>
           <a:p>
-            <a:fld id="{DC3E9EB2-937A-437F-85F0-1A581727E136}" type="slidenum">
+            <a:fld id="{740F8500-56EF-4962-AC85-F44E998371BA}" type="slidenum">
               <a:rPr lang="en-US"/>
               <a:t>‹#›</a:t>
             </a:fld>
@@ -4153,7 +4153,7 @@
           <a:bodyPr/>
           <a:lstStyle/>
           <a:p>
-            <a:fld id="{B77E711A-1989-4281-99C4-A6F5C2147E99}" type="slidenum">
+            <a:fld id="{9E4E00BC-1FCE-4F6D-8D1B-CFFE393F7FDA}" type="slidenum">
               <a:rPr lang="en-US"/>
               <a:t>‹#›</a:t>
             </a:fld>
@@ -4319,7 +4319,7 @@
           <a:bodyPr/>
           <a:lstStyle/>
           <a:p>
-            <a:fld id="{1AED1D07-0775-4769-BAD0-0C426E6D7581}" type="slidenum">
+            <a:fld id="{AE87A48B-EAD6-46C0-AEA4-DAB38E23A02D}" type="slidenum">
               <a:rPr lang="en-US"/>
               <a:t>‹#›</a:t>
             </a:fld>
@@ -4485,7 +4485,7 @@
           <a:bodyPr/>
           <a:lstStyle/>
           <a:p>
-            <a:fld id="{66EF9874-A611-498D-B4B2-9B8C6EFC6EC2}" type="slidenum">
+            <a:fld id="{3D42AD72-7C04-4823-8C23-CE40B5646AEC}" type="slidenum">
               <a:rPr lang="en-US"/>
               <a:t>‹#›</a:t>
             </a:fld>
